--- a/3-Master_Plan/re_entry/HEROs_and_PASSes/slides/auto/CHAR_empirical_team_interval_overlap_AUTO.pptx
+++ b/3-Master_Plan/re_entry/HEROs_and_PASSes/slides/auto/CHAR_empirical_team_interval_overlap_AUTO.pptx
@@ -5,9 +5,9 @@
     <p:sldMasterId id="2147483648" r:id="rId1"/>
   </p:sldMasterIdLst>
   <p:sldIdLst>
-    <p:sldId id="256" r:id="rId7"/>
+    <p:sldId id="256" r:id="rId2"/>
   </p:sldIdLst>
-  <p:sldSz cx="12191695" cy="6858000" type="screen4x3"/>
+  <p:sldSz cx="12192000" cy="6858000"/>
   <p:notesSz cx="6858000" cy="9144000"/>
   <p:defaultTextStyle>
     <a:defPPr>
@@ -104,6 +104,22 @@
       </a:defRPr>
     </a:lvl9pPr>
   </p:defaultTextStyle>
+  <p:extLst>
+    <p:ext uri="{EFAFB233-063F-42B5-8137-9DF3F51BA10A}">
+      <p15:sldGuideLst xmlns:p15="http://schemas.microsoft.com/office/powerpoint/2012/main">
+        <p15:guide id="1" orient="horz" pos="2160">
+          <p15:clr>
+            <a:srgbClr val="A4A3A4"/>
+          </p15:clr>
+        </p15:guide>
+        <p15:guide id="2" pos="2880">
+          <p15:clr>
+            <a:srgbClr val="A4A3A4"/>
+          </p15:clr>
+        </p15:guide>
+      </p15:sldGuideLst>
+    </p:ext>
+  </p:extLst>
 </p:presentation>
 </file>
 
@@ -145,10 +161,9 @@
           <a:lstStyle/>
           <a:p>
             <a:r>
-              <a:rPr lang="en-US" smtClean="0"/>
+              <a:rPr lang="en-US"/>
               <a:t>Click to edit Master title style</a:t>
             </a:r>
-            <a:endParaRPr lang="en-US"/>
           </a:p>
         </p:txBody>
       </p:sp>
@@ -264,10 +279,9 @@
           </a:lstStyle>
           <a:p>
             <a:r>
-              <a:rPr lang="en-US" smtClean="0"/>
+              <a:rPr lang="en-US"/>
               <a:t>Click to edit Master subtitle style</a:t>
             </a:r>
-            <a:endParaRPr lang="en-US"/>
           </a:p>
         </p:txBody>
       </p:sp>
@@ -288,7 +302,7 @@
           <a:p>
             <a:fld id="{5BCAD085-E8A6-8845-BD4E-CB4CCA059FC4}" type="datetimeFigureOut">
               <a:rPr lang="en-US" smtClean="0"/>
-              <a:t>1/27/13</a:t>
+              <a:t>8/11/26</a:t>
             </a:fld>
             <a:endParaRPr lang="en-US"/>
           </a:p>
@@ -382,10 +396,9 @@
           <a:lstStyle/>
           <a:p>
             <a:r>
-              <a:rPr lang="en-US" smtClean="0"/>
+              <a:rPr lang="en-US"/>
               <a:t>Click to edit Master title style</a:t>
             </a:r>
-            <a:endParaRPr lang="en-US"/>
           </a:p>
         </p:txBody>
       </p:sp>
@@ -406,38 +419,37 @@
           <a:p>
             <a:pPr lvl="0"/>
             <a:r>
-              <a:rPr lang="en-US" smtClean="0"/>
+              <a:rPr lang="en-US"/>
               <a:t>Click to edit Master text styles</a:t>
             </a:r>
           </a:p>
           <a:p>
             <a:pPr lvl="1"/>
             <a:r>
-              <a:rPr lang="en-US" smtClean="0"/>
+              <a:rPr lang="en-US"/>
               <a:t>Second level</a:t>
             </a:r>
           </a:p>
           <a:p>
             <a:pPr lvl="2"/>
             <a:r>
-              <a:rPr lang="en-US" smtClean="0"/>
+              <a:rPr lang="en-US"/>
               <a:t>Third level</a:t>
             </a:r>
           </a:p>
           <a:p>
             <a:pPr lvl="3"/>
             <a:r>
-              <a:rPr lang="en-US" smtClean="0"/>
+              <a:rPr lang="en-US"/>
               <a:t>Fourth level</a:t>
             </a:r>
           </a:p>
           <a:p>
             <a:pPr lvl="4"/>
             <a:r>
-              <a:rPr lang="en-US" smtClean="0"/>
+              <a:rPr lang="en-US"/>
               <a:t>Fifth level</a:t>
             </a:r>
-            <a:endParaRPr lang="en-US"/>
           </a:p>
         </p:txBody>
       </p:sp>
@@ -458,7 +470,7 @@
           <a:p>
             <a:fld id="{5BCAD085-E8A6-8845-BD4E-CB4CCA059FC4}" type="datetimeFigureOut">
               <a:rPr lang="en-US" smtClean="0"/>
-              <a:t>1/27/13</a:t>
+              <a:t>8/11/26</a:t>
             </a:fld>
             <a:endParaRPr lang="en-US"/>
           </a:p>
@@ -557,10 +569,9 @@
           <a:lstStyle/>
           <a:p>
             <a:r>
-              <a:rPr lang="en-US" smtClean="0"/>
+              <a:rPr lang="en-US"/>
               <a:t>Click to edit Master title style</a:t>
             </a:r>
-            <a:endParaRPr lang="en-US"/>
           </a:p>
         </p:txBody>
       </p:sp>
@@ -586,38 +597,37 @@
           <a:p>
             <a:pPr lvl="0"/>
             <a:r>
-              <a:rPr lang="en-US" smtClean="0"/>
+              <a:rPr lang="en-US"/>
               <a:t>Click to edit Master text styles</a:t>
             </a:r>
           </a:p>
           <a:p>
             <a:pPr lvl="1"/>
             <a:r>
-              <a:rPr lang="en-US" smtClean="0"/>
+              <a:rPr lang="en-US"/>
               <a:t>Second level</a:t>
             </a:r>
           </a:p>
           <a:p>
             <a:pPr lvl="2"/>
             <a:r>
-              <a:rPr lang="en-US" smtClean="0"/>
+              <a:rPr lang="en-US"/>
               <a:t>Third level</a:t>
             </a:r>
           </a:p>
           <a:p>
             <a:pPr lvl="3"/>
             <a:r>
-              <a:rPr lang="en-US" smtClean="0"/>
+              <a:rPr lang="en-US"/>
               <a:t>Fourth level</a:t>
             </a:r>
           </a:p>
           <a:p>
             <a:pPr lvl="4"/>
             <a:r>
-              <a:rPr lang="en-US" smtClean="0"/>
+              <a:rPr lang="en-US"/>
               <a:t>Fifth level</a:t>
             </a:r>
-            <a:endParaRPr lang="en-US"/>
           </a:p>
         </p:txBody>
       </p:sp>
@@ -638,7 +648,7 @@
           <a:p>
             <a:fld id="{5BCAD085-E8A6-8845-BD4E-CB4CCA059FC4}" type="datetimeFigureOut">
               <a:rPr lang="en-US" smtClean="0"/>
-              <a:t>1/27/13</a:t>
+              <a:t>8/11/26</a:t>
             </a:fld>
             <a:endParaRPr lang="en-US"/>
           </a:p>
@@ -732,10 +742,9 @@
           <a:lstStyle/>
           <a:p>
             <a:r>
-              <a:rPr lang="en-US" smtClean="0"/>
+              <a:rPr lang="en-US"/>
               <a:t>Click to edit Master title style</a:t>
             </a:r>
-            <a:endParaRPr lang="en-US"/>
           </a:p>
         </p:txBody>
       </p:sp>
@@ -756,38 +765,37 @@
           <a:p>
             <a:pPr lvl="0"/>
             <a:r>
-              <a:rPr lang="en-US" smtClean="0"/>
+              <a:rPr lang="en-US"/>
               <a:t>Click to edit Master text styles</a:t>
             </a:r>
           </a:p>
           <a:p>
             <a:pPr lvl="1"/>
             <a:r>
-              <a:rPr lang="en-US" smtClean="0"/>
+              <a:rPr lang="en-US"/>
               <a:t>Second level</a:t>
             </a:r>
           </a:p>
           <a:p>
             <a:pPr lvl="2"/>
             <a:r>
-              <a:rPr lang="en-US" smtClean="0"/>
+              <a:rPr lang="en-US"/>
               <a:t>Third level</a:t>
             </a:r>
           </a:p>
           <a:p>
             <a:pPr lvl="3"/>
             <a:r>
-              <a:rPr lang="en-US" smtClean="0"/>
+              <a:rPr lang="en-US"/>
               <a:t>Fourth level</a:t>
             </a:r>
           </a:p>
           <a:p>
             <a:pPr lvl="4"/>
             <a:r>
-              <a:rPr lang="en-US" smtClean="0"/>
+              <a:rPr lang="en-US"/>
               <a:t>Fifth level</a:t>
             </a:r>
-            <a:endParaRPr lang="en-US"/>
           </a:p>
         </p:txBody>
       </p:sp>
@@ -808,7 +816,7 @@
           <a:p>
             <a:fld id="{5BCAD085-E8A6-8845-BD4E-CB4CCA059FC4}" type="datetimeFigureOut">
               <a:rPr lang="en-US" smtClean="0"/>
-              <a:t>1/27/13</a:t>
+              <a:t>8/11/26</a:t>
             </a:fld>
             <a:endParaRPr lang="en-US"/>
           </a:p>
@@ -911,10 +919,9 @@
           </a:lstStyle>
           <a:p>
             <a:r>
-              <a:rPr lang="en-US" smtClean="0"/>
+              <a:rPr lang="en-US"/>
               <a:t>Click to edit Master title style</a:t>
             </a:r>
-            <a:endParaRPr lang="en-US"/>
           </a:p>
         </p:txBody>
       </p:sp>
@@ -1031,7 +1038,7 @@
           <a:p>
             <a:pPr lvl="0"/>
             <a:r>
-              <a:rPr lang="en-US" smtClean="0"/>
+              <a:rPr lang="en-US"/>
               <a:t>Click to edit Master text styles</a:t>
             </a:r>
           </a:p>
@@ -1054,7 +1061,7 @@
           <a:p>
             <a:fld id="{5BCAD085-E8A6-8845-BD4E-CB4CCA059FC4}" type="datetimeFigureOut">
               <a:rPr lang="en-US" smtClean="0"/>
-              <a:t>1/27/13</a:t>
+              <a:t>8/11/26</a:t>
             </a:fld>
             <a:endParaRPr lang="en-US"/>
           </a:p>
@@ -1148,10 +1155,9 @@
           <a:lstStyle/>
           <a:p>
             <a:r>
-              <a:rPr lang="en-US" smtClean="0"/>
+              <a:rPr lang="en-US"/>
               <a:t>Click to edit Master title style</a:t>
             </a:r>
-            <a:endParaRPr lang="en-US"/>
           </a:p>
         </p:txBody>
       </p:sp>
@@ -1205,38 +1211,37 @@
           <a:p>
             <a:pPr lvl="0"/>
             <a:r>
-              <a:rPr lang="en-US" smtClean="0"/>
+              <a:rPr lang="en-US"/>
               <a:t>Click to edit Master text styles</a:t>
             </a:r>
           </a:p>
           <a:p>
             <a:pPr lvl="1"/>
             <a:r>
-              <a:rPr lang="en-US" smtClean="0"/>
+              <a:rPr lang="en-US"/>
               <a:t>Second level</a:t>
             </a:r>
           </a:p>
           <a:p>
             <a:pPr lvl="2"/>
             <a:r>
-              <a:rPr lang="en-US" smtClean="0"/>
+              <a:rPr lang="en-US"/>
               <a:t>Third level</a:t>
             </a:r>
           </a:p>
           <a:p>
             <a:pPr lvl="3"/>
             <a:r>
-              <a:rPr lang="en-US" smtClean="0"/>
+              <a:rPr lang="en-US"/>
               <a:t>Fourth level</a:t>
             </a:r>
           </a:p>
           <a:p>
             <a:pPr lvl="4"/>
             <a:r>
-              <a:rPr lang="en-US" smtClean="0"/>
+              <a:rPr lang="en-US"/>
               <a:t>Fifth level</a:t>
             </a:r>
-            <a:endParaRPr lang="en-US"/>
           </a:p>
         </p:txBody>
       </p:sp>
@@ -1290,38 +1295,37 @@
           <a:p>
             <a:pPr lvl="0"/>
             <a:r>
-              <a:rPr lang="en-US" smtClean="0"/>
+              <a:rPr lang="en-US"/>
               <a:t>Click to edit Master text styles</a:t>
             </a:r>
           </a:p>
           <a:p>
             <a:pPr lvl="1"/>
             <a:r>
-              <a:rPr lang="en-US" smtClean="0"/>
+              <a:rPr lang="en-US"/>
               <a:t>Second level</a:t>
             </a:r>
           </a:p>
           <a:p>
             <a:pPr lvl="2"/>
             <a:r>
-              <a:rPr lang="en-US" smtClean="0"/>
+              <a:rPr lang="en-US"/>
               <a:t>Third level</a:t>
             </a:r>
           </a:p>
           <a:p>
             <a:pPr lvl="3"/>
             <a:r>
-              <a:rPr lang="en-US" smtClean="0"/>
+              <a:rPr lang="en-US"/>
               <a:t>Fourth level</a:t>
             </a:r>
           </a:p>
           <a:p>
             <a:pPr lvl="4"/>
             <a:r>
-              <a:rPr lang="en-US" smtClean="0"/>
+              <a:rPr lang="en-US"/>
               <a:t>Fifth level</a:t>
             </a:r>
-            <a:endParaRPr lang="en-US"/>
           </a:p>
         </p:txBody>
       </p:sp>
@@ -1342,7 +1346,7 @@
           <a:p>
             <a:fld id="{5BCAD085-E8A6-8845-BD4E-CB4CCA059FC4}" type="datetimeFigureOut">
               <a:rPr lang="en-US" smtClean="0"/>
-              <a:t>1/27/13</a:t>
+              <a:t>8/11/26</a:t>
             </a:fld>
             <a:endParaRPr lang="en-US"/>
           </a:p>
@@ -1440,10 +1444,9 @@
           </a:lstStyle>
           <a:p>
             <a:r>
-              <a:rPr lang="en-US" smtClean="0"/>
+              <a:rPr lang="en-US"/>
               <a:t>Click to edit Master title style</a:t>
             </a:r>
-            <a:endParaRPr lang="en-US"/>
           </a:p>
         </p:txBody>
       </p:sp>
@@ -1506,7 +1509,7 @@
           <a:p>
             <a:pPr lvl="0"/>
             <a:r>
-              <a:rPr lang="en-US" smtClean="0"/>
+              <a:rPr lang="en-US"/>
               <a:t>Click to edit Master text styles</a:t>
             </a:r>
           </a:p>
@@ -1562,38 +1565,37 @@
           <a:p>
             <a:pPr lvl="0"/>
             <a:r>
-              <a:rPr lang="en-US" smtClean="0"/>
+              <a:rPr lang="en-US"/>
               <a:t>Click to edit Master text styles</a:t>
             </a:r>
           </a:p>
           <a:p>
             <a:pPr lvl="1"/>
             <a:r>
-              <a:rPr lang="en-US" smtClean="0"/>
+              <a:rPr lang="en-US"/>
               <a:t>Second level</a:t>
             </a:r>
           </a:p>
           <a:p>
             <a:pPr lvl="2"/>
             <a:r>
-              <a:rPr lang="en-US" smtClean="0"/>
+              <a:rPr lang="en-US"/>
               <a:t>Third level</a:t>
             </a:r>
           </a:p>
           <a:p>
             <a:pPr lvl="3"/>
             <a:r>
-              <a:rPr lang="en-US" smtClean="0"/>
+              <a:rPr lang="en-US"/>
               <a:t>Fourth level</a:t>
             </a:r>
           </a:p>
           <a:p>
             <a:pPr lvl="4"/>
             <a:r>
-              <a:rPr lang="en-US" smtClean="0"/>
+              <a:rPr lang="en-US"/>
               <a:t>Fifth level</a:t>
             </a:r>
-            <a:endParaRPr lang="en-US"/>
           </a:p>
         </p:txBody>
       </p:sp>
@@ -1656,7 +1658,7 @@
           <a:p>
             <a:pPr lvl="0"/>
             <a:r>
-              <a:rPr lang="en-US" smtClean="0"/>
+              <a:rPr lang="en-US"/>
               <a:t>Click to edit Master text styles</a:t>
             </a:r>
           </a:p>
@@ -1712,38 +1714,37 @@
           <a:p>
             <a:pPr lvl="0"/>
             <a:r>
-              <a:rPr lang="en-US" smtClean="0"/>
+              <a:rPr lang="en-US"/>
               <a:t>Click to edit Master text styles</a:t>
             </a:r>
           </a:p>
           <a:p>
             <a:pPr lvl="1"/>
             <a:r>
-              <a:rPr lang="en-US" smtClean="0"/>
+              <a:rPr lang="en-US"/>
               <a:t>Second level</a:t>
             </a:r>
           </a:p>
           <a:p>
             <a:pPr lvl="2"/>
             <a:r>
-              <a:rPr lang="en-US" smtClean="0"/>
+              <a:rPr lang="en-US"/>
               <a:t>Third level</a:t>
             </a:r>
           </a:p>
           <a:p>
             <a:pPr lvl="3"/>
             <a:r>
-              <a:rPr lang="en-US" smtClean="0"/>
+              <a:rPr lang="en-US"/>
               <a:t>Fourth level</a:t>
             </a:r>
           </a:p>
           <a:p>
             <a:pPr lvl="4"/>
             <a:r>
-              <a:rPr lang="en-US" smtClean="0"/>
+              <a:rPr lang="en-US"/>
               <a:t>Fifth level</a:t>
             </a:r>
-            <a:endParaRPr lang="en-US"/>
           </a:p>
         </p:txBody>
       </p:sp>
@@ -1764,7 +1765,7 @@
           <a:p>
             <a:fld id="{5BCAD085-E8A6-8845-BD4E-CB4CCA059FC4}" type="datetimeFigureOut">
               <a:rPr lang="en-US" smtClean="0"/>
-              <a:t>1/27/13</a:t>
+              <a:t>8/11/26</a:t>
             </a:fld>
             <a:endParaRPr lang="en-US"/>
           </a:p>
@@ -1858,10 +1859,9 @@
           <a:lstStyle/>
           <a:p>
             <a:r>
-              <a:rPr lang="en-US" smtClean="0"/>
+              <a:rPr lang="en-US"/>
               <a:t>Click to edit Master title style</a:t>
             </a:r>
-            <a:endParaRPr lang="en-US"/>
           </a:p>
         </p:txBody>
       </p:sp>
@@ -1882,7 +1882,7 @@
           <a:p>
             <a:fld id="{5BCAD085-E8A6-8845-BD4E-CB4CCA059FC4}" type="datetimeFigureOut">
               <a:rPr lang="en-US" smtClean="0"/>
-              <a:t>1/27/13</a:t>
+              <a:t>8/11/26</a:t>
             </a:fld>
             <a:endParaRPr lang="en-US"/>
           </a:p>
@@ -1977,7 +1977,7 @@
           <a:p>
             <a:fld id="{5BCAD085-E8A6-8845-BD4E-CB4CCA059FC4}" type="datetimeFigureOut">
               <a:rPr lang="en-US" smtClean="0"/>
-              <a:t>1/27/13</a:t>
+              <a:t>8/11/26</a:t>
             </a:fld>
             <a:endParaRPr lang="en-US"/>
           </a:p>
@@ -2080,10 +2080,9 @@
           </a:lstStyle>
           <a:p>
             <a:r>
-              <a:rPr lang="en-US" smtClean="0"/>
+              <a:rPr lang="en-US"/>
               <a:t>Click to edit Master title style</a:t>
             </a:r>
-            <a:endParaRPr lang="en-US"/>
           </a:p>
         </p:txBody>
       </p:sp>
@@ -2137,38 +2136,37 @@
           <a:p>
             <a:pPr lvl="0"/>
             <a:r>
-              <a:rPr lang="en-US" smtClean="0"/>
+              <a:rPr lang="en-US"/>
               <a:t>Click to edit Master text styles</a:t>
             </a:r>
           </a:p>
           <a:p>
             <a:pPr lvl="1"/>
             <a:r>
-              <a:rPr lang="en-US" smtClean="0"/>
+              <a:rPr lang="en-US"/>
               <a:t>Second level</a:t>
             </a:r>
           </a:p>
           <a:p>
             <a:pPr lvl="2"/>
             <a:r>
-              <a:rPr lang="en-US" smtClean="0"/>
+              <a:rPr lang="en-US"/>
               <a:t>Third level</a:t>
             </a:r>
           </a:p>
           <a:p>
             <a:pPr lvl="3"/>
             <a:r>
-              <a:rPr lang="en-US" smtClean="0"/>
+              <a:rPr lang="en-US"/>
               <a:t>Fourth level</a:t>
             </a:r>
           </a:p>
           <a:p>
             <a:pPr lvl="4"/>
             <a:r>
-              <a:rPr lang="en-US" smtClean="0"/>
+              <a:rPr lang="en-US"/>
               <a:t>Fifth level</a:t>
             </a:r>
-            <a:endParaRPr lang="en-US"/>
           </a:p>
         </p:txBody>
       </p:sp>
@@ -2231,7 +2229,7 @@
           <a:p>
             <a:pPr lvl="0"/>
             <a:r>
-              <a:rPr lang="en-US" smtClean="0"/>
+              <a:rPr lang="en-US"/>
               <a:t>Click to edit Master text styles</a:t>
             </a:r>
           </a:p>
@@ -2254,7 +2252,7 @@
           <a:p>
             <a:fld id="{5BCAD085-E8A6-8845-BD4E-CB4CCA059FC4}" type="datetimeFigureOut">
               <a:rPr lang="en-US" smtClean="0"/>
-              <a:t>1/27/13</a:t>
+              <a:t>8/11/26</a:t>
             </a:fld>
             <a:endParaRPr lang="en-US"/>
           </a:p>
@@ -2357,10 +2355,9 @@
           </a:lstStyle>
           <a:p>
             <a:r>
-              <a:rPr lang="en-US" smtClean="0"/>
+              <a:rPr lang="en-US"/>
               <a:t>Click to edit Master title style</a:t>
             </a:r>
-            <a:endParaRPr lang="en-US"/>
           </a:p>
         </p:txBody>
       </p:sp>
@@ -2484,7 +2481,7 @@
           <a:p>
             <a:pPr lvl="0"/>
             <a:r>
-              <a:rPr lang="en-US" smtClean="0"/>
+              <a:rPr lang="en-US"/>
               <a:t>Click to edit Master text styles</a:t>
             </a:r>
           </a:p>
@@ -2507,7 +2504,7 @@
           <a:p>
             <a:fld id="{5BCAD085-E8A6-8845-BD4E-CB4CCA059FC4}" type="datetimeFigureOut">
               <a:rPr lang="en-US" smtClean="0"/>
-              <a:t>1/27/13</a:t>
+              <a:t>8/11/26</a:t>
             </a:fld>
             <a:endParaRPr lang="en-US"/>
           </a:p>
@@ -2616,10 +2613,9 @@
           <a:lstStyle/>
           <a:p>
             <a:r>
-              <a:rPr lang="en-US" smtClean="0"/>
+              <a:rPr lang="en-US"/>
               <a:t>Click to edit Master title style</a:t>
             </a:r>
-            <a:endParaRPr lang="en-US"/>
           </a:p>
         </p:txBody>
       </p:sp>
@@ -2650,38 +2646,37 @@
           <a:p>
             <a:pPr lvl="0"/>
             <a:r>
-              <a:rPr lang="en-US" smtClean="0"/>
+              <a:rPr lang="en-US"/>
               <a:t>Click to edit Master text styles</a:t>
             </a:r>
           </a:p>
           <a:p>
             <a:pPr lvl="1"/>
             <a:r>
-              <a:rPr lang="en-US" smtClean="0"/>
+              <a:rPr lang="en-US"/>
               <a:t>Second level</a:t>
             </a:r>
           </a:p>
           <a:p>
             <a:pPr lvl="2"/>
             <a:r>
-              <a:rPr lang="en-US" smtClean="0"/>
+              <a:rPr lang="en-US"/>
               <a:t>Third level</a:t>
             </a:r>
           </a:p>
           <a:p>
             <a:pPr lvl="3"/>
             <a:r>
-              <a:rPr lang="en-US" smtClean="0"/>
+              <a:rPr lang="en-US"/>
               <a:t>Fourth level</a:t>
             </a:r>
           </a:p>
           <a:p>
             <a:pPr lvl="4"/>
             <a:r>
-              <a:rPr lang="en-US" smtClean="0"/>
+              <a:rPr lang="en-US"/>
               <a:t>Fifth level</a:t>
             </a:r>
-            <a:endParaRPr lang="en-US"/>
           </a:p>
         </p:txBody>
       </p:sp>
@@ -2720,7 +2715,7 @@
           <a:p>
             <a:fld id="{5BCAD085-E8A6-8845-BD4E-CB4CCA059FC4}" type="datetimeFigureOut">
               <a:rPr lang="en-US" smtClean="0"/>
-              <a:t>1/27/13</a:t>
+              <a:t>8/11/26</a:t>
             </a:fld>
             <a:endParaRPr lang="en-US"/>
           </a:p>
@@ -3079,7 +3074,7 @@
 </file>
 
 <file path=ppt/slides/slide1.xml><?xml version="1.0" encoding="utf-8"?>
-<p:sld xmlns:a="http://schemas.openxmlformats.org/drawingml/2006/main" xmlns:p="http://schemas.openxmlformats.org/presentationml/2006/main" xmlns:r="http://schemas.openxmlformats.org/officeDocument/2006/relationships">
+<p:sld xmlns:a="http://schemas.openxmlformats.org/drawingml/2006/main" xmlns:r="http://schemas.openxmlformats.org/officeDocument/2006/relationships" xmlns:p="http://schemas.openxmlformats.org/presentationml/2006/main">
   <p:cSld>
     <p:spTree>
       <p:nvGrpSpPr>
@@ -3087,69 +3082,293 @@
         <p:cNvGrpSpPr/>
         <p:nvPr/>
       </p:nvGrpSpPr>
-      <p:grpSpPr/>
-      <p:sp>
-        <p:nvSpPr>
-          <p:cNvPr id="2" name="TextBox 1"/>
-          <p:cNvSpPr txBox="1"/>
-          <p:nvPr/>
-        </p:nvSpPr>
-        <p:spPr>
-          <a:xfrm>
-            <a:off x="384048" y="219456"/>
-            <a:ext cx="11423599" cy="457200"/>
-          </a:xfrm>
-          <a:prstGeom prst="rect">
-            <a:avLst/>
-          </a:prstGeom>
-          <a:noFill/>
-        </p:spPr>
-        <p:txBody>
-          <a:bodyPr wrap="none">
-            <a:spAutoFit/>
-          </a:bodyPr>
-          <a:lstStyle/>
-          <a:p>
-            <a:r>
-              <a:rPr sz="2000" b="1" i="0" baseline="0">
-                <a:latin typeface="Calibri"/>
-              </a:rPr>
-              <a:t>PD17 — Empirical team \hat{A}_{i} interval overlap (\rho diagnostic)</a:t>
-            </a:r>
-          </a:p>
-        </p:txBody>
-      </p:sp>
-      <p:sp>
-        <p:nvSpPr>
-          <p:cNvPr id="3" name="TextBox 2"/>
-          <p:cNvSpPr txBox="1"/>
-          <p:nvPr/>
-        </p:nvSpPr>
-        <p:spPr>
-          <a:xfrm>
-            <a:off x="384048" y="713232"/>
-            <a:ext cx="11423599" cy="246888"/>
-          </a:xfrm>
-          <a:prstGeom prst="rect">
-            <a:avLst/>
-          </a:prstGeom>
-          <a:noFill/>
-        </p:spPr>
-        <p:txBody>
-          <a:bodyPr wrap="none">
-            <a:spAutoFit/>
-          </a:bodyPr>
-          <a:lstStyle/>
-          <a:p>
-            <a:r>
-              <a:rPr sz="1000" b="0" i="0" baseline="0">
-                <a:latin typeface="Calibri"/>
-              </a:rPr>
-              <a:t>MBB 2011-2021 · PPM z within season · min 20 min · poolq winsor 0.01–0.99 · 6,492 team-seasons (530 CELL 8 port)</a:t>
-            </a:r>
-          </a:p>
-        </p:txBody>
-      </p:sp>
+      <p:grpSpPr>
+        <a:xfrm>
+          <a:off x="0" y="0"/>
+          <a:ext cx="0" cy="0"/>
+          <a:chOff x="0" y="0"/>
+          <a:chExt cx="0" cy="0"/>
+        </a:xfrm>
+      </p:grpSpPr>
+      <mc:AlternateContent xmlns:mc="http://schemas.openxmlformats.org/markup-compatibility/2006">
+        <mc:Choice xmlns:a14="http://schemas.microsoft.com/office/drawing/2010/main" Requires="a14">
+          <p:sp>
+            <p:nvSpPr>
+              <p:cNvPr id="2" name="TextBox 1"/>
+              <p:cNvSpPr txBox="1"/>
+              <p:nvPr/>
+            </p:nvSpPr>
+            <p:spPr>
+              <a:xfrm>
+                <a:off x="384048" y="219456"/>
+                <a:ext cx="6222473" cy="418191"/>
+              </a:xfrm>
+              <a:prstGeom prst="rect">
+                <a:avLst/>
+              </a:prstGeom>
+              <a:noFill/>
+            </p:spPr>
+            <p:txBody>
+              <a:bodyPr wrap="none">
+                <a:spAutoFit/>
+              </a:bodyPr>
+              <a:lstStyle/>
+              <a:p>
+                <a:r>
+                  <a:rPr sz="2000" b="1" i="0" baseline="0" dirty="0">
+                    <a:latin typeface="Calibri"/>
+                  </a:rPr>
+                  <a:t>PD17 — Empirical team </a:t>
+                </a:r>
+                <a14:m>
+                  <m:oMath xmlns:m="http://schemas.openxmlformats.org/officeDocument/2006/math">
+                    <m:sSub>
+                      <m:sSubPr>
+                        <m:ctrlPr>
+                          <a:rPr lang="en-US" sz="2000" b="1" i="0" baseline="0" dirty="0">
+                            <a:latin typeface="Cambria Math" panose="02040503050406030204" pitchFamily="18" charset="0"/>
+                          </a:rPr>
+                        </m:ctrlPr>
+                      </m:sSubPr>
+                      <m:e>
+                        <m:acc>
+                          <m:accPr>
+                            <m:chr m:val="ˆ"/>
+                            <m:ctrlPr>
+                              <a:rPr lang="en-US" sz="2000" b="1" i="0" baseline="0" dirty="0">
+                                <a:latin typeface="Cambria Math" panose="02040503050406030204" pitchFamily="18" charset="0"/>
+                              </a:rPr>
+                            </m:ctrlPr>
+                          </m:accPr>
+                          <m:e>
+                            <m:r>
+                              <a:rPr lang="en-US" sz="2000" b="1" i="0" baseline="0" dirty="0">
+                                <a:latin typeface="Cambria Math" panose="02040503050406030204" pitchFamily="18" charset="0"/>
+                              </a:rPr>
+                              <m:t>𝐴</m:t>
+                            </m:r>
+                          </m:e>
+                        </m:acc>
+                      </m:e>
+                      <m:sub>
+                        <m:r>
+                          <a:rPr lang="en-US" sz="2000" b="1" i="0" baseline="0" dirty="0">
+                            <a:latin typeface="Cambria Math" panose="02040503050406030204" pitchFamily="18" charset="0"/>
+                          </a:rPr>
+                          <m:t>𝑖</m:t>
+                        </m:r>
+                      </m:sub>
+                    </m:sSub>
+                  </m:oMath>
+                </a14:m>
+                <a:r>
+                  <a:rPr sz="2000" b="1" i="0" baseline="0" dirty="0">
+                    <a:latin typeface="Calibri"/>
+                  </a:rPr>
+                  <a:t> interval overlap (</a:t>
+                </a:r>
+                <a14:m>
+                  <m:oMath xmlns:m="http://schemas.openxmlformats.org/officeDocument/2006/math">
+                    <m:r>
+                      <a:rPr lang="en-US" sz="2000" b="1" i="0" baseline="0" dirty="0" smtClean="0">
+                        <a:latin typeface="Cambria Math" panose="02040503050406030204" pitchFamily="18" charset="0"/>
+                      </a:rPr>
+                      <m:t>𝜌</m:t>
+                    </m:r>
+                  </m:oMath>
+                </a14:m>
+                <a:r>
+                  <a:rPr sz="2000" b="1" i="0" baseline="0" dirty="0">
+                    <a:latin typeface="Calibri"/>
+                  </a:rPr>
+                  <a:t> diagnostic)</a:t>
+                </a:r>
+              </a:p>
+            </p:txBody>
+          </p:sp>
+        </mc:Choice>
+        <mc:Fallback>
+          <p:sp>
+            <p:nvSpPr>
+              <p:cNvPr id="2" name="TextBox 1"/>
+              <p:cNvSpPr txBox="1">
+                <a:spLocks noRot="1" noChangeAspect="1" noMove="1" noResize="1" noEditPoints="1" noAdjustHandles="1" noChangeArrowheads="1" noChangeShapeType="1" noTextEdit="1"/>
+              </p:cNvSpPr>
+              <p:nvPr/>
+            </p:nvSpPr>
+            <p:spPr>
+              <a:xfrm>
+                <a:off x="384048" y="219456"/>
+                <a:ext cx="6222473" cy="418191"/>
+              </a:xfrm>
+              <a:prstGeom prst="rect">
+                <a:avLst/>
+              </a:prstGeom>
+              <a:blipFill>
+                <a:blip r:embed="rId2"/>
+                <a:stretch>
+                  <a:fillRect l="-1018" t="-14706" b="-23529"/>
+                </a:stretch>
+              </a:blipFill>
+            </p:spPr>
+            <p:txBody>
+              <a:bodyPr/>
+              <a:lstStyle/>
+              <a:p>
+                <a:r>
+                  <a:rPr lang="en-US">
+                    <a:noFill/>
+                  </a:rPr>
+                  <a:t> </a:t>
+                </a:r>
+              </a:p>
+            </p:txBody>
+          </p:sp>
+        </mc:Fallback>
+      </mc:AlternateContent>
+      <mc:AlternateContent xmlns:mc="http://schemas.openxmlformats.org/markup-compatibility/2006">
+        <mc:Choice xmlns:a14="http://schemas.microsoft.com/office/drawing/2010/main" Requires="a14">
+          <p:sp>
+            <p:nvSpPr>
+              <p:cNvPr id="3" name="TextBox 2"/>
+              <p:cNvSpPr txBox="1"/>
+              <p:nvPr/>
+            </p:nvSpPr>
+            <p:spPr>
+              <a:xfrm>
+                <a:off x="384048" y="713232"/>
+                <a:ext cx="7142212" cy="246221"/>
+              </a:xfrm>
+              <a:prstGeom prst="rect">
+                <a:avLst/>
+              </a:prstGeom>
+              <a:noFill/>
+            </p:spPr>
+            <p:txBody>
+              <a:bodyPr wrap="none">
+                <a:spAutoFit/>
+              </a:bodyPr>
+              <a:lstStyle/>
+              <a:p>
+                <a:r>
+                  <a:rPr sz="1000" b="0" i="0" baseline="0" dirty="0">
+                    <a:latin typeface="Calibri"/>
+                  </a:rPr>
+                  <a:t>MBB 2011-2021 · PPM z within season · min 20 min · poolq winsor </a:t>
+                </a:r>
+                <a14:m>
+                  <m:oMath xmlns:m="http://schemas.openxmlformats.org/officeDocument/2006/math">
+                    <m:r>
+                      <a:rPr lang="en-US" sz="1000" b="0" i="0" baseline="0" dirty="0" smtClean="0">
+                        <a:latin typeface="Cambria Math" panose="02040503050406030204" pitchFamily="18" charset="0"/>
+                      </a:rPr>
+                      <m:t>0.01–0.99</m:t>
+                    </m:r>
+                  </m:oMath>
+                </a14:m>
+                <a:r>
+                  <a:rPr sz="1000" b="0" i="0" baseline="0" dirty="0">
+                    <a:latin typeface="Calibri"/>
+                  </a:rPr>
+                  <a:t> · </a:t>
+                </a:r>
+                <a14:m>
+                  <m:oMath xmlns:m="http://schemas.openxmlformats.org/officeDocument/2006/math">
+                    <m:r>
+                      <a:rPr lang="en-US" sz="1000" b="0" i="0" baseline="0" dirty="0" smtClean="0">
+                        <a:latin typeface="Cambria Math" panose="02040503050406030204" pitchFamily="18" charset="0"/>
+                      </a:rPr>
+                      <m:t>6,492</m:t>
+                    </m:r>
+                  </m:oMath>
+                </a14:m>
+                <a:r>
+                  <a:rPr sz="1000" b="0" i="0" baseline="0" dirty="0">
+                    <a:latin typeface="Calibri"/>
+                  </a:rPr>
+                  <a:t> team-seasons (530 CELL 8 port) · </a:t>
+                </a:r>
+                <a14:m>
+                  <m:oMath xmlns:m="http://schemas.openxmlformats.org/officeDocument/2006/math">
+                    <m:sSub>
+                      <m:sSubPr>
+                        <m:ctrlPr>
+                          <a:rPr lang="en-US" sz="1000" b="0" i="0" baseline="0" dirty="0">
+                            <a:latin typeface="Cambria Math" panose="02040503050406030204" pitchFamily="18" charset="0"/>
+                          </a:rPr>
+                        </m:ctrlPr>
+                      </m:sSubPr>
+                      <m:e>
+                        <m:r>
+                          <a:rPr lang="en-US" sz="1000" b="0" i="0" baseline="0" dirty="0">
+                            <a:latin typeface="Cambria Math" panose="02040503050406030204" pitchFamily="18" charset="0"/>
+                          </a:rPr>
+                          <m:t>𝐻</m:t>
+                        </m:r>
+                      </m:e>
+                      <m:sub>
+                        <m:r>
+                          <a:rPr lang="en-US" sz="1000" b="0" i="0" baseline="0" dirty="0">
+                            <a:latin typeface="Cambria Math" panose="02040503050406030204" pitchFamily="18" charset="0"/>
+                          </a:rPr>
+                          <m:t>𝑠𝑜𝑟𝑡</m:t>
+                        </m:r>
+                      </m:sub>
+                    </m:sSub>
+                    <m:r>
+                      <a:rPr lang="en-US" sz="1000" b="0" i="0" baseline="0" dirty="0">
+                        <a:latin typeface="Cambria Math" panose="02040503050406030204" pitchFamily="18" charset="0"/>
+                      </a:rPr>
+                      <m:t>=0.105</m:t>
+                    </m:r>
+                  </m:oMath>
+                </a14:m>
+                <a:endParaRPr sz="1000" b="0" i="0" baseline="0" dirty="0">
+                  <a:latin typeface="Calibri"/>
+                </a:endParaRPr>
+              </a:p>
+            </p:txBody>
+          </p:sp>
+        </mc:Choice>
+        <mc:Fallback>
+          <p:sp>
+            <p:nvSpPr>
+              <p:cNvPr id="3" name="TextBox 2"/>
+              <p:cNvSpPr txBox="1">
+                <a:spLocks noRot="1" noChangeAspect="1" noMove="1" noResize="1" noEditPoints="1" noAdjustHandles="1" noChangeArrowheads="1" noChangeShapeType="1" noTextEdit="1"/>
+              </p:cNvSpPr>
+              <p:nvPr/>
+            </p:nvSpPr>
+            <p:spPr>
+              <a:xfrm>
+                <a:off x="384048" y="713232"/>
+                <a:ext cx="7142212" cy="246221"/>
+              </a:xfrm>
+              <a:prstGeom prst="rect">
+                <a:avLst/>
+              </a:prstGeom>
+              <a:blipFill>
+                <a:blip r:embed="rId3"/>
+                <a:stretch>
+                  <a:fillRect b="-10000"/>
+                </a:stretch>
+              </a:blipFill>
+            </p:spPr>
+            <p:txBody>
+              <a:bodyPr/>
+              <a:lstStyle/>
+              <a:p>
+                <a:r>
+                  <a:rPr lang="en-US">
+                    <a:noFill/>
+                  </a:rPr>
+                  <a:t> </a:t>
+                </a:r>
+              </a:p>
+            </p:txBody>
+          </p:sp>
+        </mc:Fallback>
+      </mc:AlternateContent>
       <p:pic>
         <p:nvPicPr>
           <p:cNvPr id="4" name="Picture 3" descr="EMPIRICAL_team_interval_overlap.png"/>
@@ -3159,7 +3378,7 @@
           <p:nvPr/>
         </p:nvPicPr>
         <p:blipFill>
-          <a:blip r:embed="rId2"/>
+          <a:blip r:embed="rId4"/>
           <a:stretch>
             <a:fillRect/>
           </a:stretch>
@@ -3176,169 +3395,6 @@
       </p:pic>
       <p:sp>
         <p:nvSpPr>
-          <p:cNvPr id="5" name="TextBox 4"/>
-          <p:cNvSpPr txBox="1"/>
-          <p:nvPr/>
-        </p:nvSpPr>
-        <p:spPr>
-          <a:xfrm>
-            <a:off x="384048" y="3849624"/>
-            <a:ext cx="3794760" cy="2148840"/>
-          </a:xfrm>
-          <a:prstGeom prst="rect">
-            <a:avLst/>
-          </a:prstGeom>
-          <a:noFill/>
-        </p:spPr>
-        <p:txBody>
-          <a:bodyPr wrap="square">
-            <a:spAutoFit/>
-          </a:bodyPr>
-          <a:lstStyle/>
-          <a:p>
-            <a:pPr>
-              <a:buChar char="•"/>
-              <a:lnSpc>
-                <a:spcPct val="150000"/>
-              </a:lnSpc>
-              <a:spcBef>
-                <a:spcPts val="0"/>
-              </a:spcBef>
-              <a:spcAft>
-                <a:spcPts val="0"/>
-              </a:spcAft>
-            </a:pPr>
-            <a:r>
-              <a:rPr sz="1000" b="0" i="0" baseline="0">
-                <a:latin typeface="Calibri"/>
-              </a:rPr>
-              <a:t>  Each team-season: talent window [\min \hat{A}_{i}, \max \hat{A}_{i}] on PPM z.</a:t>
-            </a:r>
-          </a:p>
-          <a:p>
-            <a:pPr>
-              <a:buChar char="•"/>
-              <a:lnSpc>
-                <a:spcPct val="150000"/>
-              </a:lnSpc>
-              <a:spcBef>
-                <a:spcPts val="0"/>
-              </a:spcBef>
-              <a:spcAft>
-                <a:spcPts val="0"/>
-              </a:spcAft>
-            </a:pPr>
-            <a:r>
-              <a:rPr sz="1000" b="0" i="0" baseline="0">
-                <a:latin typeface="Calibri"/>
-              </a:rPr>
-              <a:t>  Coverage = how many windows cover a point on the spectrum (530 CELL 8).</a:t>
-            </a:r>
-          </a:p>
-          <a:p>
-            <a:pPr>
-              <a:buChar char="•"/>
-              <a:lnSpc>
-                <a:spcPct val="150000"/>
-              </a:lnSpc>
-              <a:spcBef>
-                <a:spcPts val="0"/>
-              </a:spcBef>
-              <a:spcAft>
-                <a:spcPts val="0"/>
-              </a:spcAft>
-            </a:pPr>
-            <a:r>
-              <a:rPr sz="1000" b="0" i="0" baseline="0">
-                <a:latin typeface="Calibri"/>
-              </a:rPr>
-              <a:t>  Red dashed: disjoint sort-and-chop on same player-seasons (537 B analog).</a:t>
-            </a:r>
-          </a:p>
-          <a:p>
-            <a:pPr>
-              <a:buChar char="•"/>
-              <a:lnSpc>
-                <a:spcPct val="150000"/>
-              </a:lnSpc>
-              <a:spcBef>
-                <a:spcPts val="0"/>
-              </a:spcBef>
-              <a:spcAft>
-                <a:spcPts val="0"/>
-              </a:spcAft>
-            </a:pPr>
-            <a:r>
-              <a:rPr sz="1000" b="0" i="0" baseline="0">
-                <a:latin typeface="Calibri"/>
-              </a:rPr>
-              <a:t>  Actual max coverage=6,305; sort-and-chop max=7.</a:t>
-            </a:r>
-          </a:p>
-          <a:p>
-            <a:pPr>
-              <a:buChar char="•"/>
-              <a:lnSpc>
-                <a:spcPct val="150000"/>
-              </a:lnSpc>
-              <a:spcBef>
-                <a:spcPts val="0"/>
-              </a:spcBef>
-              <a:spcAft>
-                <a:spcPts val="0"/>
-              </a:spcAft>
-            </a:pPr>
-            <a:r>
-              <a:rPr sz="1000" b="0" i="0" baseline="0">
-                <a:latin typeface="Calibri"/>
-              </a:rPr>
-              <a:t>  86\% of grid points have &gt;1 team covering.</a:t>
-            </a:r>
-          </a:p>
-          <a:p>
-            <a:pPr>
-              <a:buChar char="•"/>
-              <a:lnSpc>
-                <a:spcPct val="150000"/>
-              </a:lnSpc>
-              <a:spcBef>
-                <a:spcPts val="0"/>
-              </a:spcBef>
-              <a:spcAft>
-                <a:spcPts val="0"/>
-              </a:spcAft>
-            </a:pPr>
-            <a:r>
-              <a:rPr sz="1000" b="0" i="0" baseline="0">
-                <a:latin typeface="Calibri"/>
-              </a:rPr>
-              <a:t>  Roster span: mean=2.98 z, median=2.87 z (6,492 team-seasons).</a:t>
-            </a:r>
-          </a:p>
-          <a:p>
-            <a:pPr>
-              <a:buChar char="•"/>
-              <a:lnSpc>
-                <a:spcPct val="150000"/>
-              </a:lnSpc>
-              <a:spcBef>
-                <a:spcPts val="0"/>
-              </a:spcBef>
-              <a:spcAft>
-                <a:spcPts val="0"/>
-              </a:spcAft>
-            </a:pPr>
-            <a:r>
-              <a:rPr sz="1000" b="0" i="0" baseline="0">
-                <a:latin typeface="Calibri"/>
-              </a:rPr>
-              <a:t>  Pairs with Phase B \rho slide — sim \rho dials overlap between these curves.</a:t>
-            </a:r>
-          </a:p>
-        </p:txBody>
-      </p:sp>
-      <p:sp>
-        <p:nvSpPr>
           <p:cNvPr id="6" name="TextBox 5"/>
           <p:cNvSpPr txBox="1"/>
           <p:nvPr/>
@@ -3364,11 +3420,934 @@
               <a:rPr sz="1100" b="1" i="0" baseline="0">
                 <a:latin typeface="Calibri"/>
               </a:rPr>
-              <a:t>Claim (PD17): Real NCAA rosters leave massively overlapping team talent windows — the empirical target \rho was meant to match in sim (530 CELL 8 / 538 Plot A).</a:t>
-            </a:r>
-          </a:p>
-        </p:txBody>
-      </p:sp>
+              <a:t>Claim (PD17): Real NCAA rosters leave massively overlapping team talent windows — full 2011–2021 panel target for \rho characterization (530 CELL 8).</a:t>
+            </a:r>
+          </a:p>
+        </p:txBody>
+      </p:sp>
+      <mc:AlternateContent xmlns:mc="http://schemas.openxmlformats.org/markup-compatibility/2006">
+        <mc:Choice xmlns:a14="http://schemas.microsoft.com/office/drawing/2010/main" Requires="a14">
+          <p:sp>
+            <p:nvSpPr>
+              <p:cNvPr id="7" name="TextBox 6">
+                <a:extLst>
+                  <a:ext uri="{FF2B5EF4-FFF2-40B4-BE49-F238E27FC236}">
+                    <a16:creationId xmlns:a16="http://schemas.microsoft.com/office/drawing/2014/main" id="{9573CA96-92E5-5E38-04CC-FCAA87134494}"/>
+                  </a:ext>
+                </a:extLst>
+              </p:cNvPr>
+              <p:cNvSpPr txBox="1"/>
+              <p:nvPr/>
+            </p:nvSpPr>
+            <p:spPr>
+              <a:xfrm>
+                <a:off x="384047" y="1202289"/>
+                <a:ext cx="4387055" cy="2704074"/>
+              </a:xfrm>
+              <a:prstGeom prst="rect">
+                <a:avLst/>
+              </a:prstGeom>
+              <a:noFill/>
+            </p:spPr>
+            <p:txBody>
+              <a:bodyPr wrap="square">
+                <a:spAutoFit/>
+              </a:bodyPr>
+              <a:lstStyle/>
+              <a:p>
+                <a:pPr>
+                  <a:lnSpc>
+                    <a:spcPct val="150000"/>
+                  </a:lnSpc>
+                  <a:buChar char="•"/>
+                </a:pPr>
+                <a:r>
+                  <a:rPr sz="1000" b="0" i="0" baseline="0" dirty="0">
+                    <a:latin typeface="Calibri"/>
+                  </a:rPr>
+                  <a:t>  Each team-season: talent window [</a:t>
+                </a:r>
+                <a14:m>
+                  <m:oMath xmlns:m="http://schemas.openxmlformats.org/officeDocument/2006/math">
+                    <m:func>
+                      <m:funcPr>
+                        <m:ctrlPr>
+                          <a:rPr lang="en-US" sz="1000" b="0" i="0" baseline="0" dirty="0">
+                            <a:latin typeface="Cambria Math" panose="02040503050406030204" pitchFamily="18" charset="0"/>
+                          </a:rPr>
+                        </m:ctrlPr>
+                      </m:funcPr>
+                      <m:fName>
+                        <m:r>
+                          <m:rPr>
+                            <m:sty m:val="p"/>
+                          </m:rPr>
+                          <a:rPr lang="en-US" sz="1000" b="0" i="0" baseline="0" dirty="0">
+                            <a:latin typeface="Cambria Math" panose="02040503050406030204" pitchFamily="18" charset="0"/>
+                          </a:rPr>
+                          <m:t>min</m:t>
+                        </m:r>
+                      </m:fName>
+                      <m:e>
+                        <m:sSub>
+                          <m:sSubPr>
+                            <m:ctrlPr>
+                              <a:rPr lang="en-US" sz="1000" b="0" i="0" baseline="0" dirty="0">
+                                <a:latin typeface="Cambria Math" panose="02040503050406030204" pitchFamily="18" charset="0"/>
+                              </a:rPr>
+                            </m:ctrlPr>
+                          </m:sSubPr>
+                          <m:e>
+                            <m:acc>
+                              <m:accPr>
+                                <m:chr m:val="ˆ"/>
+                                <m:ctrlPr>
+                                  <a:rPr lang="en-US" sz="1000" b="0" i="0" baseline="0" dirty="0">
+                                    <a:latin typeface="Cambria Math" panose="02040503050406030204" pitchFamily="18" charset="0"/>
+                                  </a:rPr>
+                                </m:ctrlPr>
+                              </m:accPr>
+                              <m:e>
+                                <m:r>
+                                  <a:rPr lang="en-US" sz="1000" b="0" i="0" baseline="0" dirty="0">
+                                    <a:latin typeface="Cambria Math" panose="02040503050406030204" pitchFamily="18" charset="0"/>
+                                  </a:rPr>
+                                  <m:t>𝐴</m:t>
+                                </m:r>
+                              </m:e>
+                            </m:acc>
+                          </m:e>
+                          <m:sub>
+                            <m:r>
+                              <a:rPr lang="en-US" sz="1000" b="0" i="0" baseline="0" dirty="0">
+                                <a:latin typeface="Cambria Math" panose="02040503050406030204" pitchFamily="18" charset="0"/>
+                              </a:rPr>
+                              <m:t>𝑖</m:t>
+                            </m:r>
+                          </m:sub>
+                        </m:sSub>
+                      </m:e>
+                    </m:func>
+                    <m:r>
+                      <a:rPr lang="en-US" sz="1000" b="0" i="0" baseline="0" dirty="0">
+                        <a:latin typeface="Cambria Math" panose="02040503050406030204" pitchFamily="18" charset="0"/>
+                      </a:rPr>
+                      <m:t>,</m:t>
+                    </m:r>
+                    <m:func>
+                      <m:funcPr>
+                        <m:ctrlPr>
+                          <a:rPr lang="en-US" sz="1000" b="0" i="0" baseline="0" dirty="0">
+                            <a:latin typeface="Cambria Math" panose="02040503050406030204" pitchFamily="18" charset="0"/>
+                          </a:rPr>
+                        </m:ctrlPr>
+                      </m:funcPr>
+                      <m:fName>
+                        <m:r>
+                          <m:rPr>
+                            <m:sty m:val="p"/>
+                          </m:rPr>
+                          <a:rPr lang="en-US" sz="1000" b="0" i="0" baseline="0" dirty="0">
+                            <a:latin typeface="Cambria Math" panose="02040503050406030204" pitchFamily="18" charset="0"/>
+                          </a:rPr>
+                          <m:t>max</m:t>
+                        </m:r>
+                      </m:fName>
+                      <m:e>
+                        <m:sSub>
+                          <m:sSubPr>
+                            <m:ctrlPr>
+                              <a:rPr lang="en-US" sz="1000" b="0" i="0" baseline="0" dirty="0">
+                                <a:latin typeface="Cambria Math" panose="02040503050406030204" pitchFamily="18" charset="0"/>
+                              </a:rPr>
+                            </m:ctrlPr>
+                          </m:sSubPr>
+                          <m:e>
+                            <m:acc>
+                              <m:accPr>
+                                <m:chr m:val="ˆ"/>
+                                <m:ctrlPr>
+                                  <a:rPr lang="en-US" sz="1000" b="0" i="0" baseline="0" dirty="0">
+                                    <a:latin typeface="Cambria Math" panose="02040503050406030204" pitchFamily="18" charset="0"/>
+                                  </a:rPr>
+                                </m:ctrlPr>
+                              </m:accPr>
+                              <m:e>
+                                <m:r>
+                                  <a:rPr lang="en-US" sz="1000" b="0" i="0" baseline="0" dirty="0">
+                                    <a:latin typeface="Cambria Math" panose="02040503050406030204" pitchFamily="18" charset="0"/>
+                                  </a:rPr>
+                                  <m:t>𝐴</m:t>
+                                </m:r>
+                              </m:e>
+                            </m:acc>
+                          </m:e>
+                          <m:sub>
+                            <m:r>
+                              <a:rPr lang="en-US" sz="1000" b="0" i="0" baseline="0" dirty="0">
+                                <a:latin typeface="Cambria Math" panose="02040503050406030204" pitchFamily="18" charset="0"/>
+                              </a:rPr>
+                              <m:t>𝑖</m:t>
+                            </m:r>
+                          </m:sub>
+                        </m:sSub>
+                      </m:e>
+                    </m:func>
+                  </m:oMath>
+                </a14:m>
+                <a:r>
+                  <a:rPr sz="1000" b="0" i="0" baseline="0" dirty="0">
+                    <a:latin typeface="Calibri"/>
+                  </a:rPr>
+                  <a:t>] on PPM z.</a:t>
+                </a:r>
+              </a:p>
+              <a:p>
+                <a:pPr>
+                  <a:lnSpc>
+                    <a:spcPct val="150000"/>
+                  </a:lnSpc>
+                  <a:buChar char="•"/>
+                </a:pPr>
+                <a:r>
+                  <a:rPr sz="1000" b="0" i="0" baseline="0" dirty="0">
+                    <a:latin typeface="Calibri"/>
+                  </a:rPr>
+                  <a:t>  Coverage = how many windows cover a point on the spectrum (530 CELL 8).</a:t>
+                </a:r>
+              </a:p>
+              <a:p>
+                <a:pPr>
+                  <a:lnSpc>
+                    <a:spcPct val="150000"/>
+                  </a:lnSpc>
+                  <a:buChar char="•"/>
+                </a:pPr>
+                <a:r>
+                  <a:rPr sz="1000" b="0" i="0" baseline="0" dirty="0">
+                    <a:latin typeface="Calibri"/>
+                  </a:rPr>
+                  <a:t>  Red dashed: disjoint sort-and-chop on same player-seasons (537 B analog).</a:t>
+                </a:r>
+              </a:p>
+              <a:p>
+                <a:pPr>
+                  <a:lnSpc>
+                    <a:spcPct val="150000"/>
+                  </a:lnSpc>
+                  <a:buChar char="•"/>
+                </a:pPr>
+                <a:r>
+                  <a:rPr sz="1000" b="0" i="0" baseline="0" dirty="0">
+                    <a:latin typeface="Calibri"/>
+                  </a:rPr>
+                  <a:t>  </a:t>
+                </a:r>
+                <a14:m>
+                  <m:oMath xmlns:m="http://schemas.openxmlformats.org/officeDocument/2006/math">
+                    <m:sSub>
+                      <m:sSubPr>
+                        <m:ctrlPr>
+                          <a:rPr lang="en-US" sz="1000" b="0" i="0" baseline="0" dirty="0">
+                            <a:latin typeface="Cambria Math" panose="02040503050406030204" pitchFamily="18" charset="0"/>
+                          </a:rPr>
+                        </m:ctrlPr>
+                      </m:sSubPr>
+                      <m:e>
+                        <m:r>
+                          <a:rPr lang="en-US" sz="1000" b="0" i="0" baseline="0" dirty="0">
+                            <a:latin typeface="Cambria Math" panose="02040503050406030204" pitchFamily="18" charset="0"/>
+                          </a:rPr>
+                          <m:t>𝐻</m:t>
+                        </m:r>
+                      </m:e>
+                      <m:sub>
+                        <m:r>
+                          <a:rPr lang="en-US" sz="1000" b="0" i="0" baseline="0" dirty="0">
+                            <a:latin typeface="Cambria Math" panose="02040503050406030204" pitchFamily="18" charset="0"/>
+                          </a:rPr>
+                          <m:t>𝑠𝑜𝑟𝑡</m:t>
+                        </m:r>
+                      </m:sub>
+                    </m:sSub>
+                    <m:r>
+                      <a:rPr lang="en-US" sz="1000" b="0" i="0" baseline="0" dirty="0">
+                        <a:latin typeface="Cambria Math" panose="02040503050406030204" pitchFamily="18" charset="0"/>
+                      </a:rPr>
+                      <m:t>=1−</m:t>
+                    </m:r>
+                    <m:nary>
+                      <m:naryPr>
+                        <m:chr m:val="∑"/>
+                        <m:limLoc m:val="undOvr"/>
+                        <m:supHide m:val="on"/>
+                        <m:ctrlPr>
+                          <a:rPr lang="en-US" sz="1000" b="0" i="0" baseline="0" dirty="0">
+                            <a:latin typeface="Cambria Math" panose="02040503050406030204" pitchFamily="18" charset="0"/>
+                          </a:rPr>
+                        </m:ctrlPr>
+                      </m:naryPr>
+                      <m:sub>
+                        <m:r>
+                          <a:rPr lang="en-US" sz="1000" b="0" i="0" baseline="0" dirty="0">
+                            <a:latin typeface="Cambria Math" panose="02040503050406030204" pitchFamily="18" charset="0"/>
+                          </a:rPr>
+                          <m:t>𝑖</m:t>
+                        </m:r>
+                      </m:sub>
+                      <m:sup/>
+                      <m:e>
+                        <m:sSup>
+                          <m:sSupPr>
+                            <m:ctrlPr>
+                              <a:rPr lang="en-US" sz="1000" b="0" i="0" baseline="0" dirty="0">
+                                <a:latin typeface="Cambria Math" panose="02040503050406030204" pitchFamily="18" charset="0"/>
+                              </a:rPr>
+                            </m:ctrlPr>
+                          </m:sSupPr>
+                          <m:e>
+                            <m:d>
+                              <m:dPr>
+                                <m:ctrlPr>
+                                  <a:rPr lang="en-US" sz="1000" b="0" i="0" baseline="0" dirty="0">
+                                    <a:latin typeface="Cambria Math" panose="02040503050406030204" pitchFamily="18" charset="0"/>
+                                  </a:rPr>
+                                </m:ctrlPr>
+                              </m:dPr>
+                              <m:e>
+                                <m:sSub>
+                                  <m:sSubPr>
+                                    <m:ctrlPr>
+                                      <a:rPr lang="en-US" sz="1000" b="0" i="0" baseline="0" dirty="0">
+                                        <a:latin typeface="Cambria Math" panose="02040503050406030204" pitchFamily="18" charset="0"/>
+                                      </a:rPr>
+                                    </m:ctrlPr>
+                                  </m:sSubPr>
+                                  <m:e>
+                                    <m:acc>
+                                      <m:accPr>
+                                        <m:chr m:val="ˆ"/>
+                                        <m:ctrlPr>
+                                          <a:rPr lang="en-US" sz="1000" b="0" i="0" baseline="0" dirty="0">
+                                            <a:latin typeface="Cambria Math" panose="02040503050406030204" pitchFamily="18" charset="0"/>
+                                          </a:rPr>
+                                        </m:ctrlPr>
+                                      </m:accPr>
+                                      <m:e>
+                                        <m:r>
+                                          <a:rPr lang="en-US" sz="1000" b="0" i="0" baseline="0" dirty="0">
+                                            <a:latin typeface="Cambria Math" panose="02040503050406030204" pitchFamily="18" charset="0"/>
+                                          </a:rPr>
+                                          <m:t>𝐴</m:t>
+                                        </m:r>
+                                      </m:e>
+                                    </m:acc>
+                                  </m:e>
+                                  <m:sub>
+                                    <m:r>
+                                      <a:rPr lang="en-US" sz="1000" b="0" i="0" baseline="0" dirty="0">
+                                        <a:latin typeface="Cambria Math" panose="02040503050406030204" pitchFamily="18" charset="0"/>
+                                      </a:rPr>
+                                      <m:t>𝑖</m:t>
+                                    </m:r>
+                                  </m:sub>
+                                </m:sSub>
+                                <m:r>
+                                  <a:rPr lang="en-US" sz="1000" b="0" i="0" baseline="0" dirty="0">
+                                    <a:latin typeface="Cambria Math" panose="02040503050406030204" pitchFamily="18" charset="0"/>
+                                  </a:rPr>
+                                  <m:t>−</m:t>
+                                </m:r>
+                                <m:sSub>
+                                  <m:sSubPr>
+                                    <m:ctrlPr>
+                                      <a:rPr lang="en-US" sz="1000" b="0" i="0" baseline="0" dirty="0">
+                                        <a:latin typeface="Cambria Math" panose="02040503050406030204" pitchFamily="18" charset="0"/>
+                                      </a:rPr>
+                                    </m:ctrlPr>
+                                  </m:sSubPr>
+                                  <m:e>
+                                    <m:acc>
+                                      <m:accPr>
+                                        <m:chr m:val="ˆ"/>
+                                        <m:ctrlPr>
+                                          <a:rPr lang="en-US" sz="1000" b="0" i="0" baseline="0" dirty="0">
+                                            <a:latin typeface="Cambria Math" panose="02040503050406030204" pitchFamily="18" charset="0"/>
+                                          </a:rPr>
+                                        </m:ctrlPr>
+                                      </m:accPr>
+                                      <m:e>
+                                        <m:r>
+                                          <a:rPr lang="en-US" sz="1000" b="0" i="0" baseline="0" dirty="0">
+                                            <a:latin typeface="Cambria Math" panose="02040503050406030204" pitchFamily="18" charset="0"/>
+                                          </a:rPr>
+                                          <m:t>𝜇</m:t>
+                                        </m:r>
+                                      </m:e>
+                                    </m:acc>
+                                  </m:e>
+                                  <m:sub>
+                                    <m:r>
+                                      <a:rPr lang="en-US" sz="1000" b="0" i="0" baseline="0" dirty="0">
+                                        <a:latin typeface="Cambria Math" panose="02040503050406030204" pitchFamily="18" charset="0"/>
+                                      </a:rPr>
+                                      <m:t>𝑔</m:t>
+                                    </m:r>
+                                    <m:d>
+                                      <m:dPr>
+                                        <m:ctrlPr>
+                                          <a:rPr lang="en-US" sz="1000" b="0" i="0" baseline="0" dirty="0">
+                                            <a:latin typeface="Cambria Math" panose="02040503050406030204" pitchFamily="18" charset="0"/>
+                                          </a:rPr>
+                                        </m:ctrlPr>
+                                      </m:dPr>
+                                      <m:e>
+                                        <m:r>
+                                          <a:rPr lang="en-US" sz="1000" b="0" i="0" baseline="0" dirty="0">
+                                            <a:latin typeface="Cambria Math" panose="02040503050406030204" pitchFamily="18" charset="0"/>
+                                          </a:rPr>
+                                          <m:t>𝑖</m:t>
+                                        </m:r>
+                                      </m:e>
+                                    </m:d>
+                                  </m:sub>
+                                </m:sSub>
+                              </m:e>
+                            </m:d>
+                          </m:e>
+                          <m:sup>
+                            <m:r>
+                              <a:rPr lang="en-US" sz="1000" b="0" i="0" baseline="0" dirty="0">
+                                <a:latin typeface="Cambria Math" panose="02040503050406030204" pitchFamily="18" charset="0"/>
+                              </a:rPr>
+                              <m:t>2</m:t>
+                            </m:r>
+                          </m:sup>
+                        </m:sSup>
+                      </m:e>
+                    </m:nary>
+                    <m:r>
+                      <a:rPr lang="en-US" sz="1000" b="0" i="0" baseline="0" dirty="0">
+                        <a:latin typeface="Cambria Math" panose="02040503050406030204" pitchFamily="18" charset="0"/>
+                      </a:rPr>
+                      <m:t>/</m:t>
+                    </m:r>
+                    <m:nary>
+                      <m:naryPr>
+                        <m:chr m:val="∑"/>
+                        <m:limLoc m:val="undOvr"/>
+                        <m:supHide m:val="on"/>
+                        <m:ctrlPr>
+                          <a:rPr lang="en-US" sz="1000" b="0" i="0" baseline="0" dirty="0">
+                            <a:latin typeface="Cambria Math" panose="02040503050406030204" pitchFamily="18" charset="0"/>
+                          </a:rPr>
+                        </m:ctrlPr>
+                      </m:naryPr>
+                      <m:sub>
+                        <m:r>
+                          <a:rPr lang="en-US" sz="1000" b="0" i="0" baseline="0" dirty="0">
+                            <a:latin typeface="Cambria Math" panose="02040503050406030204" pitchFamily="18" charset="0"/>
+                          </a:rPr>
+                          <m:t>𝑖</m:t>
+                        </m:r>
+                      </m:sub>
+                      <m:sup/>
+                      <m:e>
+                        <m:sSup>
+                          <m:sSupPr>
+                            <m:ctrlPr>
+                              <a:rPr lang="en-US" sz="1000" b="0" i="0" baseline="0" dirty="0">
+                                <a:latin typeface="Cambria Math" panose="02040503050406030204" pitchFamily="18" charset="0"/>
+                              </a:rPr>
+                            </m:ctrlPr>
+                          </m:sSupPr>
+                          <m:e>
+                            <m:d>
+                              <m:dPr>
+                                <m:ctrlPr>
+                                  <a:rPr lang="en-US" sz="1000" b="0" i="0" baseline="0" dirty="0">
+                                    <a:latin typeface="Cambria Math" panose="02040503050406030204" pitchFamily="18" charset="0"/>
+                                  </a:rPr>
+                                </m:ctrlPr>
+                              </m:dPr>
+                              <m:e>
+                                <m:sSub>
+                                  <m:sSubPr>
+                                    <m:ctrlPr>
+                                      <a:rPr lang="en-US" sz="1000" b="0" i="0" baseline="0" dirty="0">
+                                        <a:latin typeface="Cambria Math" panose="02040503050406030204" pitchFamily="18" charset="0"/>
+                                      </a:rPr>
+                                    </m:ctrlPr>
+                                  </m:sSubPr>
+                                  <m:e>
+                                    <m:acc>
+                                      <m:accPr>
+                                        <m:chr m:val="ˆ"/>
+                                        <m:ctrlPr>
+                                          <a:rPr lang="en-US" sz="1000" b="0" i="0" baseline="0" dirty="0">
+                                            <a:latin typeface="Cambria Math" panose="02040503050406030204" pitchFamily="18" charset="0"/>
+                                          </a:rPr>
+                                        </m:ctrlPr>
+                                      </m:accPr>
+                                      <m:e>
+                                        <m:r>
+                                          <a:rPr lang="en-US" sz="1000" b="0" i="0" baseline="0" dirty="0">
+                                            <a:latin typeface="Cambria Math" panose="02040503050406030204" pitchFamily="18" charset="0"/>
+                                          </a:rPr>
+                                          <m:t>𝐴</m:t>
+                                        </m:r>
+                                      </m:e>
+                                    </m:acc>
+                                  </m:e>
+                                  <m:sub>
+                                    <m:r>
+                                      <a:rPr lang="en-US" sz="1000" b="0" i="0" baseline="0" dirty="0">
+                                        <a:latin typeface="Cambria Math" panose="02040503050406030204" pitchFamily="18" charset="0"/>
+                                      </a:rPr>
+                                      <m:t>𝑖</m:t>
+                                    </m:r>
+                                  </m:sub>
+                                </m:sSub>
+                                <m:r>
+                                  <a:rPr lang="en-US" sz="1000" b="0" i="0" baseline="0" dirty="0">
+                                    <a:latin typeface="Cambria Math" panose="02040503050406030204" pitchFamily="18" charset="0"/>
+                                  </a:rPr>
+                                  <m:t>−</m:t>
+                                </m:r>
+                                <m:acc>
+                                  <m:accPr>
+                                    <m:chr m:val="̅"/>
+                                    <m:ctrlPr>
+                                      <a:rPr lang="en-US" sz="1000" b="0" i="0" baseline="0" dirty="0">
+                                        <a:latin typeface="Cambria Math" panose="02040503050406030204" pitchFamily="18" charset="0"/>
+                                      </a:rPr>
+                                    </m:ctrlPr>
+                                  </m:accPr>
+                                  <m:e>
+                                    <m:r>
+                                      <a:rPr lang="en-US" sz="1000" b="0" i="0" baseline="0" dirty="0">
+                                        <a:latin typeface="Cambria Math" panose="02040503050406030204" pitchFamily="18" charset="0"/>
+                                      </a:rPr>
+                                      <m:t>𝐴</m:t>
+                                    </m:r>
+                                  </m:e>
+                                </m:acc>
+                              </m:e>
+                            </m:d>
+                          </m:e>
+                          <m:sup>
+                            <m:r>
+                              <a:rPr lang="en-US" sz="1000" b="0" i="0" baseline="0" dirty="0">
+                                <a:latin typeface="Cambria Math" panose="02040503050406030204" pitchFamily="18" charset="0"/>
+                              </a:rPr>
+                              <m:t>2</m:t>
+                            </m:r>
+                          </m:sup>
+                        </m:sSup>
+                      </m:e>
+                    </m:nary>
+                  </m:oMath>
+                </a14:m>
+                <a:r>
+                  <a:rPr sz="1000" b="0" i="0" baseline="0" dirty="0">
+                    <a:latin typeface="Calibri"/>
+                  </a:rPr>
+                  <a:t> — realized sorting on a fixed partition.</a:t>
+                </a:r>
+              </a:p>
+              <a:p>
+                <a:pPr>
+                  <a:lnSpc>
+                    <a:spcPct val="150000"/>
+                  </a:lnSpc>
+                  <a:buChar char="•"/>
+                </a:pPr>
+                <a:r>
+                  <a:rPr sz="1000" b="0" i="0" baseline="0" dirty="0">
+                    <a:latin typeface="Calibri"/>
+                  </a:rPr>
+                  <a:t>  NCAA partition: </a:t>
+                </a:r>
+                <a14:m>
+                  <m:oMath xmlns:m="http://schemas.openxmlformats.org/officeDocument/2006/math">
+                    <m:sSub>
+                      <m:sSubPr>
+                        <m:ctrlPr>
+                          <a:rPr lang="en-US" sz="1000" b="0" i="0" baseline="0" dirty="0">
+                            <a:latin typeface="Cambria Math" panose="02040503050406030204" pitchFamily="18" charset="0"/>
+                          </a:rPr>
+                        </m:ctrlPr>
+                      </m:sSubPr>
+                      <m:e>
+                        <m:r>
+                          <a:rPr lang="en-US" sz="1000" b="0" i="0" baseline="0" dirty="0">
+                            <a:latin typeface="Cambria Math" panose="02040503050406030204" pitchFamily="18" charset="0"/>
+                          </a:rPr>
+                          <m:t>𝐻</m:t>
+                        </m:r>
+                      </m:e>
+                      <m:sub>
+                        <m:r>
+                          <a:rPr lang="en-US" sz="1000" b="0" i="0" baseline="0" dirty="0">
+                            <a:latin typeface="Cambria Math" panose="02040503050406030204" pitchFamily="18" charset="0"/>
+                          </a:rPr>
+                          <m:t>𝑠𝑜𝑟𝑡</m:t>
+                        </m:r>
+                      </m:sub>
+                    </m:sSub>
+                    <m:r>
+                      <a:rPr lang="en-US" sz="1000" b="0" i="0" baseline="0" dirty="0">
+                        <a:latin typeface="Cambria Math" panose="02040503050406030204" pitchFamily="18" charset="0"/>
+                      </a:rPr>
+                      <m:t>=0.105</m:t>
+                    </m:r>
+                  </m:oMath>
+                </a14:m>
+                <a:r>
+                  <a:rPr sz="1000" b="0" i="0" baseline="0" dirty="0">
+                    <a:latin typeface="Calibri"/>
+                  </a:rPr>
+                  <a:t> (0 = none, 1 = full team sorting).</a:t>
+                </a:r>
+              </a:p>
+              <a:p>
+                <a:pPr>
+                  <a:lnSpc>
+                    <a:spcPct val="150000"/>
+                  </a:lnSpc>
+                  <a:buChar char="•"/>
+                </a:pPr>
+                <a:r>
+                  <a:rPr sz="1000" b="0" i="0" baseline="0" dirty="0">
+                    <a:latin typeface="Calibri"/>
+                  </a:rPr>
+                  <a:t>  Max coverage</a:t>
+                </a:r>
+                <a:r>
+                  <a:rPr lang="en-US" sz="1000" b="0" i="0" baseline="0" dirty="0">
+                    <a:latin typeface="Calibri"/>
+                  </a:rPr>
+                  <a:t> </a:t>
+                </a:r>
+                <a14:m>
+                  <m:oMath xmlns:m="http://schemas.openxmlformats.org/officeDocument/2006/math">
+                    <m:r>
+                      <a:rPr lang="en-US" sz="1000" b="0" i="0" baseline="0" dirty="0" smtClean="0">
+                        <a:latin typeface="Cambria Math" panose="02040503050406030204" pitchFamily="18" charset="0"/>
+                      </a:rPr>
+                      <m:t>=6,305</m:t>
+                    </m:r>
+                  </m:oMath>
+                </a14:m>
+                <a:r>
+                  <a:rPr sz="1000" b="0" i="0" baseline="0" dirty="0">
+                    <a:latin typeface="Calibri"/>
+                  </a:rPr>
+                  <a:t>; sort-and-chop max</a:t>
+                </a:r>
+                <a:r>
+                  <a:rPr lang="en-US" sz="1000" b="0" i="0" baseline="0" dirty="0">
+                    <a:latin typeface="Calibri"/>
+                  </a:rPr>
+                  <a:t> </a:t>
+                </a:r>
+                <a14:m>
+                  <m:oMath xmlns:m="http://schemas.openxmlformats.org/officeDocument/2006/math">
+                    <m:r>
+                      <a:rPr lang="en-US" sz="1000" b="0" i="0" baseline="0" dirty="0" smtClean="0">
+                        <a:latin typeface="Cambria Math" panose="02040503050406030204" pitchFamily="18" charset="0"/>
+                      </a:rPr>
+                      <m:t>=7</m:t>
+                    </m:r>
+                  </m:oMath>
+                </a14:m>
+                <a:r>
+                  <a:rPr sz="1000" b="0" i="0" baseline="0" dirty="0">
+                    <a:latin typeface="Calibri"/>
+                  </a:rPr>
+                  <a:t>. Normalized peak</a:t>
+                </a:r>
+                <a:r>
+                  <a:rPr lang="en-US" sz="1000" b="0" i="0" baseline="0" dirty="0">
+                    <a:latin typeface="Calibri"/>
+                  </a:rPr>
+                  <a:t> </a:t>
+                </a:r>
+                <a14:m>
+                  <m:oMath xmlns:m="http://schemas.openxmlformats.org/officeDocument/2006/math">
+                    <m:r>
+                      <a:rPr lang="en-US" sz="1000" b="0" i="0" baseline="0" dirty="0" smtClean="0">
+                        <a:latin typeface="Cambria Math" panose="02040503050406030204" pitchFamily="18" charset="0"/>
+                      </a:rPr>
+                      <m:t>=0.97</m:t>
+                    </m:r>
+                  </m:oMath>
+                </a14:m>
+                <a:r>
+                  <a:rPr sz="1000" b="0" i="0" baseline="0" dirty="0">
+                    <a:latin typeface="Calibri"/>
+                  </a:rPr>
+                  <a:t>.</a:t>
+                </a:r>
+              </a:p>
+              <a:p>
+                <a:pPr>
+                  <a:lnSpc>
+                    <a:spcPct val="150000"/>
+                  </a:lnSpc>
+                  <a:buChar char="•"/>
+                </a:pPr>
+                <a:r>
+                  <a:rPr sz="1000" b="0" i="0" baseline="0" dirty="0">
+                    <a:latin typeface="Calibri"/>
+                  </a:rPr>
+                  <a:t>  </a:t>
+                </a:r>
+                <a14:m>
+                  <m:oMath xmlns:m="http://schemas.openxmlformats.org/officeDocument/2006/math">
+                    <m:r>
+                      <a:rPr lang="en-US" sz="1000" b="0" i="0" baseline="0" dirty="0" smtClean="0">
+                        <a:latin typeface="Cambria Math" panose="02040503050406030204" pitchFamily="18" charset="0"/>
+                      </a:rPr>
+                      <m:t>86%</m:t>
+                    </m:r>
+                  </m:oMath>
+                </a14:m>
+                <a:r>
+                  <a:rPr sz="1000" b="0" i="0" baseline="0" dirty="0">
+                    <a:latin typeface="Calibri"/>
+                  </a:rPr>
+                  <a:t> of grid points have </a:t>
+                </a:r>
+                <a14:m>
+                  <m:oMath xmlns:m="http://schemas.openxmlformats.org/officeDocument/2006/math">
+                    <m:r>
+                      <a:rPr lang="en-US" sz="1000" b="0" i="0" baseline="0" dirty="0" smtClean="0">
+                        <a:latin typeface="Cambria Math" panose="02040503050406030204" pitchFamily="18" charset="0"/>
+                      </a:rPr>
+                      <m:t>&gt;1</m:t>
+                    </m:r>
+                  </m:oMath>
+                </a14:m>
+                <a:r>
+                  <a:rPr sz="1000" b="0" i="0" baseline="0" dirty="0">
+                    <a:latin typeface="Calibri"/>
+                  </a:rPr>
+                  <a:t> team covering.</a:t>
+                </a:r>
+              </a:p>
+              <a:p>
+                <a:pPr>
+                  <a:lnSpc>
+                    <a:spcPct val="150000"/>
+                  </a:lnSpc>
+                  <a:buChar char="•"/>
+                </a:pPr>
+                <a:r>
+                  <a:rPr sz="1000" b="0" i="0" baseline="0" dirty="0">
+                    <a:latin typeface="Calibri"/>
+                  </a:rPr>
+                  <a:t>  Roster span: mean</a:t>
+                </a:r>
+                <a:r>
+                  <a:rPr lang="en-US" sz="1000" b="0" i="0" baseline="0" dirty="0">
+                    <a:latin typeface="Calibri"/>
+                  </a:rPr>
+                  <a:t> </a:t>
+                </a:r>
+                <a14:m>
+                  <m:oMath xmlns:m="http://schemas.openxmlformats.org/officeDocument/2006/math">
+                    <m:r>
+                      <a:rPr lang="en-US" sz="1000" b="0" i="0" baseline="0" dirty="0" smtClean="0">
+                        <a:latin typeface="Cambria Math" panose="02040503050406030204" pitchFamily="18" charset="0"/>
+                      </a:rPr>
+                      <m:t>=2.98</m:t>
+                    </m:r>
+                  </m:oMath>
+                </a14:m>
+                <a:r>
+                  <a:rPr sz="1000" b="0" i="0" baseline="0" dirty="0">
+                    <a:latin typeface="Calibri"/>
+                  </a:rPr>
+                  <a:t> z, median</a:t>
+                </a:r>
+                <a:r>
+                  <a:rPr lang="en-US" sz="1000" b="0" i="0" baseline="0" dirty="0">
+                    <a:latin typeface="Calibri"/>
+                  </a:rPr>
+                  <a:t> </a:t>
+                </a:r>
+                <a14:m>
+                  <m:oMath xmlns:m="http://schemas.openxmlformats.org/officeDocument/2006/math">
+                    <m:r>
+                      <a:rPr lang="en-US" sz="1000" b="0" i="0" baseline="0" dirty="0" smtClean="0">
+                        <a:latin typeface="Cambria Math" panose="02040503050406030204" pitchFamily="18" charset="0"/>
+                      </a:rPr>
+                      <m:t>=2.87</m:t>
+                    </m:r>
+                  </m:oMath>
+                </a14:m>
+                <a:r>
+                  <a:rPr sz="1000" b="0" i="0" baseline="0" dirty="0">
+                    <a:latin typeface="Calibri"/>
+                  </a:rPr>
+                  <a:t> z (</a:t>
+                </a:r>
+                <a14:m>
+                  <m:oMath xmlns:m="http://schemas.openxmlformats.org/officeDocument/2006/math">
+                    <m:r>
+                      <a:rPr lang="en-US" sz="1000" b="0" i="0" baseline="0" dirty="0" smtClean="0">
+                        <a:latin typeface="Cambria Math" panose="02040503050406030204" pitchFamily="18" charset="0"/>
+                      </a:rPr>
+                      <m:t>6,492</m:t>
+                    </m:r>
+                  </m:oMath>
+                </a14:m>
+                <a:r>
+                  <a:rPr sz="1000" b="0" i="0" baseline="0" dirty="0">
+                    <a:latin typeface="Calibri"/>
+                  </a:rPr>
+                  <a:t> team-seasons).</a:t>
+                </a:r>
+              </a:p>
+              <a:p>
+                <a:pPr>
+                  <a:lnSpc>
+                    <a:spcPct val="150000"/>
+                  </a:lnSpc>
+                  <a:buFontTx/>
+                  <a:buChar char="•"/>
+                </a:pPr>
+                <a:r>
+                  <a:rPr sz="1000" b="0" i="0" baseline="0" dirty="0">
+                    <a:latin typeface="Calibri"/>
+                  </a:rPr>
+                  <a:t>  </a:t>
+                </a:r>
+                <a:r>
+                  <a:rPr lang="en-US" sz="1000" dirty="0"/>
+                  <a:t>Full panel 2011–2021 — pooled team-seasons (not 1:1 with single-season sim)</a:t>
+                </a:r>
+                <a:r>
+                  <a:rPr sz="1000" b="0" i="0" baseline="0" dirty="0">
+                    <a:latin typeface="Calibri"/>
+                  </a:rPr>
+                  <a:t>.</a:t>
+                </a:r>
+              </a:p>
+              <a:p>
+                <a:pPr>
+                  <a:lnSpc>
+                    <a:spcPct val="150000"/>
+                  </a:lnSpc>
+                  <a:buChar char="•"/>
+                </a:pPr>
+                <a:r>
+                  <a:rPr sz="1000" b="0" i="0" baseline="0" dirty="0">
+                    <a:latin typeface="Calibri"/>
+                  </a:rPr>
+                  <a:t>  VECTOR lock: </a:t>
+                </a:r>
+                <a14:m>
+                  <m:oMath xmlns:m="http://schemas.openxmlformats.org/officeDocument/2006/math">
+                    <m:sSub>
+                      <m:sSubPr>
+                        <m:ctrlPr>
+                          <a:rPr lang="en-US" sz="1000" b="0" i="0" baseline="0" dirty="0">
+                            <a:latin typeface="Cambria Math" panose="02040503050406030204" pitchFamily="18" charset="0"/>
+                          </a:rPr>
+                        </m:ctrlPr>
+                      </m:sSubPr>
+                      <m:e>
+                        <m:r>
+                          <a:rPr lang="en-US" sz="1000" b="0" i="0" baseline="0" dirty="0">
+                            <a:latin typeface="Cambria Math" panose="02040503050406030204" pitchFamily="18" charset="0"/>
+                          </a:rPr>
+                          <m:t>𝐻</m:t>
+                        </m:r>
+                      </m:e>
+                      <m:sub>
+                        <m:r>
+                          <a:rPr lang="en-US" sz="1000" b="0" i="0" baseline="0" dirty="0">
+                            <a:latin typeface="Cambria Math" panose="02040503050406030204" pitchFamily="18" charset="0"/>
+                          </a:rPr>
+                          <m:t>𝑠𝑜𝑟𝑡</m:t>
+                        </m:r>
+                      </m:sub>
+                    </m:sSub>
+                  </m:oMath>
+                </a14:m>
+                <a:r>
+                  <a:rPr sz="1000" b="0" i="0" baseline="0" dirty="0">
+                    <a:latin typeface="Calibri"/>
+                  </a:rPr>
+                  <a:t> is realized sorting — not the generative homophily knob </a:t>
+                </a:r>
+                <a14:m>
+                  <m:oMath xmlns:m="http://schemas.openxmlformats.org/officeDocument/2006/math">
+                    <m:r>
+                      <a:rPr lang="en-US" sz="1000" b="0" i="0" baseline="0" dirty="0" smtClean="0">
+                        <a:latin typeface="Cambria Math" panose="02040503050406030204" pitchFamily="18" charset="0"/>
+                      </a:rPr>
+                      <m:t>𝜌</m:t>
+                    </m:r>
+                  </m:oMath>
+                </a14:m>
+                <a:r>
+                  <a:rPr sz="1000" b="0" i="0" baseline="0" dirty="0">
+                    <a:latin typeface="Calibri"/>
+                  </a:rPr>
+                  <a:t>.</a:t>
+                </a:r>
+              </a:p>
+            </p:txBody>
+          </p:sp>
+        </mc:Choice>
+        <mc:Fallback>
+          <p:sp>
+            <p:nvSpPr>
+              <p:cNvPr id="7" name="TextBox 6">
+                <a:extLst>
+                  <a:ext uri="{FF2B5EF4-FFF2-40B4-BE49-F238E27FC236}">
+                    <a16:creationId xmlns:a16="http://schemas.microsoft.com/office/drawing/2014/main" id="{9573CA96-92E5-5E38-04CC-FCAA87134494}"/>
+                  </a:ext>
+                </a:extLst>
+              </p:cNvPr>
+              <p:cNvSpPr txBox="1">
+                <a:spLocks noRot="1" noChangeAspect="1" noMove="1" noResize="1" noEditPoints="1" noAdjustHandles="1" noChangeArrowheads="1" noChangeShapeType="1" noTextEdit="1"/>
+              </p:cNvSpPr>
+              <p:nvPr/>
+            </p:nvSpPr>
+            <p:spPr>
+              <a:xfrm>
+                <a:off x="384047" y="1202289"/>
+                <a:ext cx="4387055" cy="2704074"/>
+              </a:xfrm>
+              <a:prstGeom prst="rect">
+                <a:avLst/>
+              </a:prstGeom>
+              <a:blipFill>
+                <a:blip r:embed="rId5"/>
+                <a:stretch>
+                  <a:fillRect b="-467"/>
+                </a:stretch>
+              </a:blipFill>
+            </p:spPr>
+            <p:txBody>
+              <a:bodyPr/>
+              <a:lstStyle/>
+              <a:p>
+                <a:r>
+                  <a:rPr lang="en-US">
+                    <a:noFill/>
+                  </a:rPr>
+                  <a:t> </a:t>
+                </a:r>
+              </a:p>
+            </p:txBody>
+          </p:sp>
+        </mc:Fallback>
+      </mc:AlternateContent>
     </p:spTree>
   </p:cSld>
   <p:clrMapOvr>
